--- a/lecons/LSA/Geography of Cameroon/06_LSA_CAM_L06_Population_Change_in_Cameroon.pptx
+++ b/lecons/LSA/Geography of Cameroon/06_LSA_CAM_L06_Population_Change_in_Cameroon.pptx
@@ -8613,7 +8613,7 @@
                 <a:ea typeface="Times New Roman" pitchFamily="34" charset="-122"/>
                 <a:cs typeface="Times New Roman" pitchFamily="34" charset="-120"/>
               </a:rPr>
-              <a:t>"</a:t>
+              <a:t>She asks: "Why is the population of Cameroon growing so fast, why is it so unevenly spread, and why do people move so much?"</a:t>
             </a:r>
             <a:endParaRPr lang="en-US" sz="4000" dirty="0"/>
           </a:p>
